--- a/影石黑客松_Pitch.pptx
+++ b/影石黑客松_Pitch.pptx
@@ -15,6 +15,8 @@
     <p:sldId id="262" r:id="rId9"/>
     <p:sldId id="263" r:id="rId10"/>
     <p:sldId id="264" r:id="rId11"/>
+    <p:sldId id="265" r:id="rId12"/>
+    <p:sldId id="266" r:id="rId13"/>
   </p:sldIdLst>
   <p:sldSz cx="12192000" cy="6858000" type="screen16x9"/>
   <p:notesSz cx="6858000" cy="9144000"/>
@@ -170,7 +172,7 @@
                 <a:latin typeface="Calibri"/>
                 <a:ea typeface="Microsoft YaHei"/>
               </a:rPr>
-              <a:t>AI Memory Space</a:t>
+              <a:t>忆境 Relive</a:t>
             </a:r>
           </a:p>
         </p:txBody>
@@ -241,7 +243,7 @@
                 <a:latin typeface="Calibri"/>
                 <a:ea typeface="Microsoft YaHei"/>
               </a:rPr>
-              <a:t>影石黑客松 · AI+影像开发赛道</a:t>
+              <a:t>记忆驱动的 AI 剪辑 · 影石黑客松 AI+影像开发赛道</a:t>
             </a:r>
           </a:p>
         </p:txBody>
@@ -285,7 +287,7 @@
                 <a:latin typeface="Calibri"/>
                 <a:ea typeface="Microsoft YaHei"/>
               </a:rPr>
-              <a:t>让影石拍下的每个空间都成为可进入的记忆</a:t>
+              <a:t>它记得你拍的每一刻，所以剪得更懂你</a:t>
             </a:r>
           </a:p>
         </p:txBody>
@@ -354,7 +356,7 @@
                 <a:latin typeface="Calibri"/>
                 <a:ea typeface="Microsoft YaHei"/>
               </a:rPr>
-              <a:t>唯一工程焦点 + 愿景</a:t>
+              <a:t>北极星指标</a:t>
             </a:r>
           </a:p>
         </p:txBody>
@@ -420,90 +422,762 @@
               <a:buChar char="•"/>
             </a:pPr>
             <a:r>
-              <a:rPr lang="zh-CN" sz="1900" b="0" dirty="0">
-                <a:solidFill>
-                  <a:srgbClr val="262626"/>
-                </a:solidFill>
-                <a:latin typeface="Calibri"/>
-                <a:ea typeface="Microsoft YaHei"/>
-              </a:rPr>
-              <a:t>一段真实 360° 素材 → AI 理解事件 → 自然语言检索 → 空间位置重现</a:t>
-            </a:r>
-          </a:p>
-          <a:p>
-            <a:pPr algn="l">
-              <a:spcBef>
-                <a:spcPts val="0"/>
-              </a:spcBef>
-              <a:spcAft>
-                <a:spcPts val="700"/>
-              </a:spcAft>
-              <a:buFont typeface="Arial"/>
-              <a:buChar char="•"/>
-            </a:pPr>
-            <a:r>
-              <a:rPr lang="zh-CN" sz="1900" b="0" dirty="0">
-                <a:solidFill>
-                  <a:srgbClr val="262626"/>
-                </a:solidFill>
-                <a:latin typeface="Calibri"/>
-                <a:ea typeface="Microsoft YaHei"/>
-              </a:rPr>
-              <a:t>这条链路跑通，选片 / 3D / 手势 / VR 都变成核心能力的不同表现</a:t>
-            </a:r>
-          </a:p>
-          <a:p>
-            <a:pPr algn="l">
-              <a:spcBef>
-                <a:spcPts val="0"/>
-              </a:spcBef>
-              <a:spcAft>
-                <a:spcPts val="700"/>
-              </a:spcAft>
-              <a:buFont typeface="Arial"/>
-              <a:buChar char="•"/>
-            </a:pPr>
-            <a:r>
-              <a:rPr lang="zh-CN" sz="1900" b="0" dirty="0">
-                <a:solidFill>
-                  <a:srgbClr val="262626"/>
-                </a:solidFill>
-                <a:latin typeface="Calibri"/>
-                <a:ea typeface="Microsoft YaHei"/>
-              </a:rPr>
-              <a:t>愿景：影石多设备 AI 的统一</a:t>
-            </a:r>
-            <a:r>
-              <a:rPr lang="zh-CN" sz="1900" b="1" dirty="0">
-                <a:solidFill>
-                  <a:srgbClr val="262626"/>
-                </a:solidFill>
-                <a:latin typeface="Calibri"/>
-                <a:ea typeface="Microsoft YaHei"/>
-              </a:rPr>
-              <a:t>记忆入口</a:t>
-            </a:r>
-          </a:p>
-          <a:p>
-            <a:pPr algn="l">
-              <a:spcBef>
-                <a:spcPts val="0"/>
-              </a:spcBef>
-              <a:spcAft>
-                <a:spcPts val="700"/>
-              </a:spcAft>
-              <a:buFont typeface="Arial"/>
-              <a:buChar char="•"/>
-            </a:pPr>
-            <a:r>
-              <a:rPr lang="zh-CN" sz="1900" b="0" dirty="0">
-                <a:solidFill>
-                  <a:srgbClr val="262626"/>
-                </a:solidFill>
-                <a:latin typeface="Calibri"/>
-                <a:ea typeface="Microsoft YaHei"/>
-              </a:rPr>
-              <a:t>「从人操作设备，走向</a:t>
+              <a:rPr lang="zh-CN" sz="1900" b="1" dirty="0">
+                <a:solidFill>
+                  <a:srgbClr val="262626"/>
+                </a:solidFill>
+                <a:latin typeface="Calibri"/>
+                <a:ea typeface="Microsoft YaHei"/>
+              </a:rPr>
+              <a:t>每周被采纳的 AI 剪辑次数</a:t>
+            </a:r>
+            <a:r>
+              <a:rPr lang="zh-CN" sz="1900" b="0" dirty="0">
+                <a:solidFill>
+                  <a:srgbClr val="262626"/>
+                </a:solidFill>
+                <a:latin typeface="Calibri"/>
+                <a:ea typeface="Microsoft YaHei"/>
+              </a:rPr>
+              <a:t>：一句话指令 → 取材正确 → 用户保留 ≥80% 并导出</a:t>
+            </a:r>
+          </a:p>
+          <a:p>
+            <a:pPr algn="l">
+              <a:spcBef>
+                <a:spcPts val="0"/>
+              </a:spcBef>
+              <a:spcAft>
+                <a:spcPts val="700"/>
+              </a:spcAft>
+              <a:buFont typeface="Arial"/>
+              <a:buChar char="•"/>
+            </a:pPr>
+            <a:r>
+              <a:rPr lang="zh-CN" sz="1900" b="0" dirty="0">
+                <a:solidFill>
+                  <a:srgbClr val="262626"/>
+                </a:solidFill>
+                <a:latin typeface="Calibri"/>
+                <a:ea typeface="Microsoft YaHei"/>
+              </a:rPr>
+              <a:t>三环缺一不可：取材错了是硬伤，用户全推翻是没懂</a:t>
+            </a:r>
+          </a:p>
+          <a:p>
+            <a:pPr algn="l">
+              <a:spcBef>
+                <a:spcPts val="0"/>
+              </a:spcBef>
+              <a:spcAft>
+                <a:spcPts val="700"/>
+              </a:spcAft>
+              <a:buFont typeface="Arial"/>
+              <a:buChar char="•"/>
+            </a:pPr>
+            <a:r>
+              <a:rPr lang="zh-CN" sz="1900" b="0" dirty="0">
+                <a:solidFill>
+                  <a:srgbClr val="262626"/>
+                </a:solidFill>
+                <a:latin typeface="Calibri"/>
+                <a:ea typeface="Microsoft YaHei"/>
+              </a:rPr>
+              <a:t>护栏：取材精确率 </a:t>
+            </a:r>
+            <a:r>
+              <a:rPr lang="zh-CN" sz="1900" b="1" dirty="0">
+                <a:solidFill>
+                  <a:srgbClr val="262626"/>
+                </a:solidFill>
+                <a:latin typeface="Calibri"/>
+                <a:ea typeface="Microsoft YaHei"/>
+              </a:rPr>
+              <a:t>≥3/5</a:t>
+            </a:r>
+            <a:r>
+              <a:rPr lang="zh-CN" sz="1900" b="0" dirty="0">
+                <a:solidFill>
+                  <a:srgbClr val="262626"/>
+                </a:solidFill>
+                <a:latin typeface="Calibri"/>
+                <a:ea typeface="Microsoft YaHei"/>
+              </a:rPr>
+              <a:t> · 指令到时间轴 </a:t>
+            </a:r>
+            <a:r>
+              <a:rPr lang="zh-CN" sz="1900" b="1" dirty="0">
+                <a:solidFill>
+                  <a:srgbClr val="262626"/>
+                </a:solidFill>
+                <a:latin typeface="Calibri"/>
+                <a:ea typeface="Microsoft YaHei"/>
+              </a:rPr>
+              <a:t>&lt;30s</a:t>
+            </a:r>
+            <a:r>
+              <a:rPr lang="zh-CN" sz="1900" b="0" dirty="0">
+                <a:solidFill>
+                  <a:srgbClr val="262626"/>
+                </a:solidFill>
+                <a:latin typeface="Calibri"/>
+                <a:ea typeface="Microsoft YaHei"/>
+              </a:rPr>
+              <a:t> · 定位跳转 </a:t>
+            </a:r>
+            <a:r>
+              <a:rPr lang="zh-CN" sz="1900" b="1" dirty="0">
+                <a:solidFill>
+                  <a:srgbClr val="262626"/>
+                </a:solidFill>
+                <a:latin typeface="Calibri"/>
+                <a:ea typeface="Microsoft YaHei"/>
+              </a:rPr>
+              <a:t>&lt;5s</a:t>
+            </a:r>
+          </a:p>
+          <a:p>
+            <a:pPr algn="l">
+              <a:spcBef>
+                <a:spcPts val="0"/>
+              </a:spcBef>
+              <a:spcAft>
+                <a:spcPts val="700"/>
+              </a:spcAft>
+              <a:buFont typeface="Arial"/>
+              <a:buChar char="•"/>
+            </a:pPr>
+            <a:r>
+              <a:rPr lang="zh-CN" sz="1900" b="0" dirty="0">
+                <a:solidFill>
+                  <a:srgbClr val="262626"/>
+                </a:solidFill>
+                <a:latin typeface="Calibri"/>
+                <a:ea typeface="Microsoft YaHei"/>
+              </a:rPr>
+              <a:t>演示日版本：三个一句话指令全部产出可用成片 + 连续三次完整演示</a:t>
+            </a:r>
+          </a:p>
+          <a:p>
+            <a:pPr algn="l">
+              <a:spcBef>
+                <a:spcPts val="0"/>
+              </a:spcBef>
+              <a:spcAft>
+                <a:spcPts val="700"/>
+              </a:spcAft>
+              <a:buFont typeface="Arial"/>
+              <a:buChar char="•"/>
+            </a:pPr>
+            <a:r>
+              <a:rPr lang="zh-CN" sz="1900" b="0" dirty="0">
+                <a:solidFill>
+                  <a:srgbClr val="262626"/>
+                </a:solidFill>
+                <a:latin typeface="Calibri"/>
+                <a:ea typeface="Microsoft YaHei"/>
+              </a:rPr>
+              <a:t>不数虚荣指标：渲染时长、星系浏览时长、生成卡片数</a:t>
+            </a:r>
+          </a:p>
+        </p:txBody>
+      </p:sp>
+    </p:spTree>
+  </p:cSld>
+  <p:clrMapOvr>
+    <a:masterClrMapping/>
+  </p:clrMapOvr>
+</p:sld>
+</file>
+
+<file path=ppt/slides/slide11.xml><?xml version="1.0" encoding="utf-8"?>
+<p:sld xmlns:a="http://schemas.openxmlformats.org/drawingml/2006/main" xmlns:r="http://schemas.openxmlformats.org/officeDocument/2006/relationships" xmlns:p="http://schemas.openxmlformats.org/presentationml/2006/main">
+  <p:cSld>
+    <p:spTree>
+      <p:nvGrpSpPr>
+        <p:cNvPr id="1" name=""/>
+        <p:cNvGrpSpPr/>
+        <p:nvPr/>
+      </p:nvGrpSpPr>
+      <p:grpSpPr>
+        <a:xfrm>
+          <a:off x="0" y="0"/>
+          <a:ext cx="0" cy="0"/>
+          <a:chOff x="0" y="0"/>
+          <a:chExt cx="0" cy="0"/>
+        </a:xfrm>
+      </p:grpSpPr>
+      <p:sp>
+        <p:nvSpPr>
+          <p:cNvPr id="2" name="tb2"/>
+          <p:cNvSpPr/>
+          <p:nvPr/>
+        </p:nvSpPr>
+        <p:spPr>
+          <a:xfrm>
+            <a:off x="457200" y="274320"/>
+            <a:ext cx="11277600" cy="850000"/>
+          </a:xfrm>
+          <a:prstGeom prst="rect">
+            <a:avLst/>
+          </a:prstGeom>
+          <a:noFill/>
+          <a:ln>
+            <a:noFill/>
+          </a:ln>
+        </p:spPr>
+        <p:txBody>
+          <a:bodyPr anchor="ctr"/>
+          <a:lstStyle/>
+          <a:p>
+            <a:pPr algn="l">
+              <a:spcBef>
+                <a:spcPts val="0"/>
+              </a:spcBef>
+              <a:spcAft>
+                <a:spcPts val="0"/>
+              </a:spcAft>
+            </a:pPr>
+            <a:r>
+              <a:rPr lang="zh-CN" sz="3000" b="1" dirty="0">
+                <a:solidFill>
+                  <a:srgbClr val="1F3864"/>
+                </a:solidFill>
+                <a:latin typeface="Calibri"/>
+                <a:ea typeface="Microsoft YaHei"/>
+              </a:rPr>
+              <a:t>技术架构（语义与审美分离）</a:t>
+            </a:r>
+          </a:p>
+        </p:txBody>
+      </p:sp>
+      <p:sp>
+        <p:nvSpPr>
+          <p:cNvPr id="3" name="bar3"/>
+          <p:cNvSpPr/>
+          <p:nvPr/>
+        </p:nvSpPr>
+        <p:spPr>
+          <a:xfrm>
+            <a:off x="457200" y="1250000"/>
+            <a:ext cx="2743200" cy="68580"/>
+          </a:xfrm>
+          <a:prstGeom prst="rect">
+            <a:avLst/>
+          </a:prstGeom>
+          <a:solidFill>
+            <a:srgbClr val="2E5496"/>
+          </a:solidFill>
+          <a:ln>
+            <a:noFill/>
+          </a:ln>
+        </p:spPr>
+        <p:txBody>
+          <a:bodyPr/>
+          <a:lstStyle/>
+          <a:p/>
+        </p:txBody>
+      </p:sp>
+      <p:sp>
+        <p:nvSpPr>
+          <p:cNvPr id="4" name="tb4"/>
+          <p:cNvSpPr/>
+          <p:nvPr/>
+        </p:nvSpPr>
+        <p:spPr>
+          <a:xfrm>
+            <a:off x="457200" y="1500000"/>
+            <a:ext cx="11277600" cy="5108000"/>
+          </a:xfrm>
+          <a:prstGeom prst="rect">
+            <a:avLst/>
+          </a:prstGeom>
+          <a:noFill/>
+          <a:ln>
+            <a:noFill/>
+          </a:ln>
+        </p:spPr>
+        <p:txBody>
+          <a:bodyPr anchor="t"/>
+          <a:lstStyle/>
+          <a:p>
+            <a:pPr algn="l">
+              <a:spcBef>
+                <a:spcPts val="0"/>
+              </a:spcBef>
+              <a:spcAft>
+                <a:spcPts val="700"/>
+              </a:spcAft>
+              <a:buFont typeface="Arial"/>
+              <a:buChar char="•"/>
+            </a:pPr>
+            <a:r>
+              <a:rPr lang="zh-CN" sz="1900" b="0" dirty="0">
+                <a:solidFill>
+                  <a:srgbClr val="262626"/>
+                </a:solidFill>
+                <a:latin typeface="Calibri"/>
+                <a:ea typeface="Microsoft YaHei"/>
+              </a:rPr>
+              <a:t>空间事件理解层：Event Timeline + Spatial Map + Subject Track</a:t>
+            </a:r>
+          </a:p>
+          <a:p>
+            <a:pPr algn="l">
+              <a:spcBef>
+                <a:spcPts val="0"/>
+              </a:spcBef>
+              <a:spcAft>
+                <a:spcPts val="700"/>
+              </a:spcAft>
+              <a:buFont typeface="Arial"/>
+              <a:buChar char="•"/>
+            </a:pPr>
+            <a:r>
+              <a:rPr lang="zh-CN" sz="1900" b="0" dirty="0">
+                <a:solidFill>
+                  <a:srgbClr val="262626"/>
+                </a:solidFill>
+                <a:latin typeface="Calibri"/>
+                <a:ea typeface="Microsoft YaHei"/>
+              </a:rPr>
+              <a:t>意图 / 查询层 · VLM → query.json（</a:t>
+            </a:r>
+            <a:r>
+              <a:rPr lang="zh-CN" sz="1900" b="1" dirty="0">
+                <a:solidFill>
+                  <a:srgbClr val="262626"/>
+                </a:solidFill>
+                <a:latin typeface="Calibri"/>
+                <a:ea typeface="Microsoft YaHei"/>
+              </a:rPr>
+              <a:t>白名单 Schema，仅枚举值</a:t>
+            </a:r>
+            <a:r>
+              <a:rPr lang="zh-CN" sz="1900" b="0" dirty="0">
+                <a:solidFill>
+                  <a:srgbClr val="262626"/>
+                </a:solidFill>
+                <a:latin typeface="Calibri"/>
+                <a:ea typeface="Microsoft YaHei"/>
+              </a:rPr>
+              <a:t>）</a:t>
+            </a:r>
+          </a:p>
+          <a:p>
+            <a:pPr algn="l">
+              <a:spcBef>
+                <a:spcPts val="0"/>
+              </a:spcBef>
+              <a:spcAft>
+                <a:spcPts val="700"/>
+              </a:spcAft>
+              <a:buFont typeface="Arial"/>
+              <a:buChar char="•"/>
+            </a:pPr>
+            <a:r>
+              <a:rPr lang="zh-CN" sz="1900" b="0" dirty="0">
+                <a:solidFill>
+                  <a:srgbClr val="262626"/>
+                </a:solidFill>
+                <a:latin typeface="Calibri"/>
+                <a:ea typeface="Microsoft YaHei"/>
+              </a:rPr>
+              <a:t>记忆精选层：选 / 删 / 藏 → 偏好权重（</a:t>
+            </a:r>
+            <a:r>
+              <a:rPr lang="zh-CN" sz="1900" b="1" dirty="0">
+                <a:solidFill>
+                  <a:srgbClr val="262626"/>
+                </a:solidFill>
+                <a:latin typeface="Calibri"/>
+                <a:ea typeface="Microsoft YaHei"/>
+              </a:rPr>
+              <a:t>不做人格测试</a:t>
+            </a:r>
+            <a:r>
+              <a:rPr lang="zh-CN" sz="1900" b="0" dirty="0">
+                <a:solidFill>
+                  <a:srgbClr val="262626"/>
+                </a:solidFill>
+                <a:latin typeface="Calibri"/>
+                <a:ea typeface="Microsoft YaHei"/>
+              </a:rPr>
+              <a:t>）</a:t>
+            </a:r>
+          </a:p>
+          <a:p>
+            <a:pPr algn="l">
+              <a:spcBef>
+                <a:spcPts val="0"/>
+              </a:spcBef>
+              <a:spcAft>
+                <a:spcPts val="700"/>
+              </a:spcAft>
+              <a:buFont typeface="Arial"/>
+              <a:buChar char="•"/>
+            </a:pPr>
+            <a:r>
+              <a:rPr lang="zh-CN" sz="1900" b="0" dirty="0">
+                <a:solidFill>
+                  <a:srgbClr val="262626"/>
+                </a:solidFill>
+                <a:latin typeface="Calibri"/>
+                <a:ea typeface="Microsoft YaHei"/>
+              </a:rPr>
+              <a:t>剪辑执行层：确定性时间轴操作 · 空间重构层：深度 / 视差 / 3DGS</a:t>
+            </a:r>
+          </a:p>
+          <a:p>
+            <a:pPr algn="l">
+              <a:spcBef>
+                <a:spcPts val="0"/>
+              </a:spcBef>
+              <a:spcAft>
+                <a:spcPts val="700"/>
+              </a:spcAft>
+              <a:buFont typeface="Arial"/>
+              <a:buChar char="•"/>
+            </a:pPr>
+            <a:r>
+              <a:rPr lang="zh-CN" sz="1900" b="1" dirty="0">
+                <a:solidFill>
+                  <a:srgbClr val="262626"/>
+                </a:solidFill>
+                <a:latin typeface="Calibri"/>
+                <a:ea typeface="Microsoft YaHei"/>
+              </a:rPr>
+              <a:t>VLM 不进实时环</a:t>
+            </a:r>
+            <a:r>
+              <a:rPr lang="zh-CN" sz="1900" b="0" dirty="0">
+                <a:solidFill>
+                  <a:srgbClr val="262626"/>
+                </a:solidFill>
+                <a:latin typeface="Calibri"/>
+                <a:ea typeface="Microsoft YaHei"/>
+              </a:rPr>
+              <a:t>，下游全确定性、秒级重跑</a:t>
+            </a:r>
+          </a:p>
+        </p:txBody>
+      </p:sp>
+    </p:spTree>
+  </p:cSld>
+  <p:clrMapOvr>
+    <a:masterClrMapping/>
+  </p:clrMapOvr>
+</p:sld>
+</file>
+
+<file path=ppt/slides/slide12.xml><?xml version="1.0" encoding="utf-8"?>
+<p:sld xmlns:a="http://schemas.openxmlformats.org/drawingml/2006/main" xmlns:r="http://schemas.openxmlformats.org/officeDocument/2006/relationships" xmlns:p="http://schemas.openxmlformats.org/presentationml/2006/main">
+  <p:cSld>
+    <p:spTree>
+      <p:nvGrpSpPr>
+        <p:cNvPr id="1" name=""/>
+        <p:cNvGrpSpPr/>
+        <p:nvPr/>
+      </p:nvGrpSpPr>
+      <p:grpSpPr>
+        <a:xfrm>
+          <a:off x="0" y="0"/>
+          <a:ext cx="0" cy="0"/>
+          <a:chOff x="0" y="0"/>
+          <a:chExt cx="0" cy="0"/>
+        </a:xfrm>
+      </p:grpSpPr>
+      <p:sp>
+        <p:nvSpPr>
+          <p:cNvPr id="2" name="tb2"/>
+          <p:cNvSpPr/>
+          <p:nvPr/>
+        </p:nvSpPr>
+        <p:spPr>
+          <a:xfrm>
+            <a:off x="457200" y="274320"/>
+            <a:ext cx="11277600" cy="850000"/>
+          </a:xfrm>
+          <a:prstGeom prst="rect">
+            <a:avLst/>
+          </a:prstGeom>
+          <a:noFill/>
+          <a:ln>
+            <a:noFill/>
+          </a:ln>
+        </p:spPr>
+        <p:txBody>
+          <a:bodyPr anchor="ctr"/>
+          <a:lstStyle/>
+          <a:p>
+            <a:pPr algn="l">
+              <a:spcBef>
+                <a:spcPts val="0"/>
+              </a:spcBef>
+              <a:spcAft>
+                <a:spcPts val="0"/>
+              </a:spcAft>
+            </a:pPr>
+            <a:r>
+              <a:rPr lang="zh-CN" sz="3000" b="1" dirty="0">
+                <a:solidFill>
+                  <a:srgbClr val="1F3864"/>
+                </a:solidFill>
+                <a:latin typeface="Calibri"/>
+                <a:ea typeface="Microsoft YaHei"/>
+              </a:rPr>
+              <a:t>48h 路线图 + 愿景</a:t>
+            </a:r>
+          </a:p>
+        </p:txBody>
+      </p:sp>
+      <p:sp>
+        <p:nvSpPr>
+          <p:cNvPr id="3" name="bar3"/>
+          <p:cNvSpPr/>
+          <p:nvPr/>
+        </p:nvSpPr>
+        <p:spPr>
+          <a:xfrm>
+            <a:off x="457200" y="1250000"/>
+            <a:ext cx="2743200" cy="68580"/>
+          </a:xfrm>
+          <a:prstGeom prst="rect">
+            <a:avLst/>
+          </a:prstGeom>
+          <a:solidFill>
+            <a:srgbClr val="2E5496"/>
+          </a:solidFill>
+          <a:ln>
+            <a:noFill/>
+          </a:ln>
+        </p:spPr>
+        <p:txBody>
+          <a:bodyPr/>
+          <a:lstStyle/>
+          <a:p/>
+        </p:txBody>
+      </p:sp>
+      <p:sp>
+        <p:nvSpPr>
+          <p:cNvPr id="4" name="tb4"/>
+          <p:cNvSpPr/>
+          <p:nvPr/>
+        </p:nvSpPr>
+        <p:spPr>
+          <a:xfrm>
+            <a:off x="457200" y="1500000"/>
+            <a:ext cx="11277600" cy="5108000"/>
+          </a:xfrm>
+          <a:prstGeom prst="rect">
+            <a:avLst/>
+          </a:prstGeom>
+          <a:noFill/>
+          <a:ln>
+            <a:noFill/>
+          </a:ln>
+        </p:spPr>
+        <p:txBody>
+          <a:bodyPr anchor="t"/>
+          <a:lstStyle/>
+          <a:p>
+            <a:pPr algn="l">
+              <a:spcBef>
+                <a:spcPts val="0"/>
+              </a:spcBef>
+              <a:spcAft>
+                <a:spcPts val="700"/>
+              </a:spcAft>
+              <a:buFont typeface="Arial"/>
+              <a:buChar char="•"/>
+            </a:pPr>
+            <a:r>
+              <a:rPr lang="zh-CN" sz="1900" b="0" dirty="0">
+                <a:solidFill>
+                  <a:srgbClr val="262626"/>
+                </a:solidFill>
+                <a:latin typeface="Calibri"/>
+                <a:ea typeface="Microsoft YaHei"/>
+              </a:rPr>
+              <a:t>M0 · 0–6h 素材 + Schema · M1 · 6–18h 空间事件理解（主体丢失 </a:t>
+            </a:r>
+            <a:r>
+              <a:rPr lang="zh-CN" sz="1900" b="1" dirty="0">
+                <a:solidFill>
+                  <a:srgbClr val="262626"/>
+                </a:solidFill>
+                <a:latin typeface="Calibri"/>
+                <a:ea typeface="Microsoft YaHei"/>
+              </a:rPr>
+              <a:t>&lt;5%</a:t>
+            </a:r>
+            <a:r>
+              <a:rPr lang="zh-CN" sz="1900" b="0" dirty="0">
+                <a:solidFill>
+                  <a:srgbClr val="262626"/>
+                </a:solidFill>
+                <a:latin typeface="Calibri"/>
+                <a:ea typeface="Microsoft YaHei"/>
+              </a:rPr>
+              <a:t>）</a:t>
+            </a:r>
+          </a:p>
+          <a:p>
+            <a:pPr algn="l">
+              <a:spcBef>
+                <a:spcPts val="0"/>
+              </a:spcBef>
+              <a:spcAft>
+                <a:spcPts val="700"/>
+              </a:spcAft>
+              <a:buFont typeface="Arial"/>
+              <a:buChar char="•"/>
+            </a:pPr>
+            <a:r>
+              <a:rPr lang="zh-CN" sz="1900" b="0" dirty="0">
+                <a:solidFill>
+                  <a:srgbClr val="262626"/>
+                </a:solidFill>
+                <a:latin typeface="Calibri"/>
+                <a:ea typeface="Microsoft YaHei"/>
+              </a:rPr>
+              <a:t>M2 · 18–30h 语义锚定（「朋友在哪」命中 </a:t>
+            </a:r>
+            <a:r>
+              <a:rPr lang="zh-CN" sz="1900" b="1" dirty="0">
+                <a:solidFill>
+                  <a:srgbClr val="262626"/>
+                </a:solidFill>
+                <a:latin typeface="Calibri"/>
+                <a:ea typeface="Microsoft YaHei"/>
+              </a:rPr>
+              <a:t>≥3/5</a:t>
+            </a:r>
+            <a:r>
+              <a:rPr lang="zh-CN" sz="1900" b="0" dirty="0">
+                <a:solidFill>
+                  <a:srgbClr val="262626"/>
+                </a:solidFill>
+                <a:latin typeface="Calibri"/>
+                <a:ea typeface="Microsoft YaHei"/>
+              </a:rPr>
+              <a:t>）</a:t>
+            </a:r>
+          </a:p>
+          <a:p>
+            <a:pPr algn="l">
+              <a:spcBef>
+                <a:spcPts val="0"/>
+              </a:spcBef>
+              <a:spcAft>
+                <a:spcPts val="700"/>
+              </a:spcAft>
+              <a:buFont typeface="Arial"/>
+              <a:buChar char="•"/>
+            </a:pPr>
+            <a:r>
+              <a:rPr lang="zh-CN" sz="1900" b="0" dirty="0">
+                <a:solidFill>
+                  <a:srgbClr val="262626"/>
+                </a:solidFill>
+                <a:latin typeface="Calibri"/>
+                <a:ea typeface="Microsoft YaHei"/>
+              </a:rPr>
+              <a:t>M3 · 30–42h 取材 + 时间轴 + 星系（指令到时间轴 </a:t>
+            </a:r>
+            <a:r>
+              <a:rPr lang="zh-CN" sz="1900" b="1" dirty="0">
+                <a:solidFill>
+                  <a:srgbClr val="262626"/>
+                </a:solidFill>
+                <a:latin typeface="Calibri"/>
+                <a:ea typeface="Microsoft YaHei"/>
+              </a:rPr>
+              <a:t>&lt;30s</a:t>
+            </a:r>
+            <a:r>
+              <a:rPr lang="zh-CN" sz="1900" b="0" dirty="0">
+                <a:solidFill>
+                  <a:srgbClr val="262626"/>
+                </a:solidFill>
+                <a:latin typeface="Calibri"/>
+                <a:ea typeface="Microsoft YaHei"/>
+              </a:rPr>
+              <a:t>） · M4 · 演示叙事</a:t>
+            </a:r>
+          </a:p>
+          <a:p>
+            <a:pPr algn="l">
+              <a:spcBef>
+                <a:spcPts val="0"/>
+              </a:spcBef>
+              <a:spcAft>
+                <a:spcPts val="700"/>
+              </a:spcAft>
+              <a:buFont typeface="Arial"/>
+              <a:buChar char="•"/>
+            </a:pPr>
+            <a:r>
+              <a:rPr lang="zh-CN" sz="1900" b="0" dirty="0">
+                <a:solidFill>
+                  <a:srgbClr val="262626"/>
+                </a:solidFill>
+                <a:latin typeface="Calibri"/>
+                <a:ea typeface="Microsoft YaHei"/>
+              </a:rPr>
+              <a:t>最差 fallback ≈ 影石已有能力，</a:t>
+            </a:r>
+            <a:r>
+              <a:rPr lang="zh-CN" sz="1900" b="1" dirty="0">
+                <a:solidFill>
+                  <a:srgbClr val="262626"/>
+                </a:solidFill>
+                <a:latin typeface="Calibri"/>
+                <a:ea typeface="Microsoft YaHei"/>
+              </a:rPr>
+              <a:t>不比基线差</a:t>
+            </a:r>
+          </a:p>
+          <a:p>
+            <a:pPr algn="l">
+              <a:spcBef>
+                <a:spcPts val="0"/>
+              </a:spcBef>
+              <a:spcAft>
+                <a:spcPts val="700"/>
+              </a:spcAft>
+              <a:buFont typeface="Arial"/>
+              <a:buChar char="•"/>
+            </a:pPr>
+            <a:r>
+              <a:rPr lang="zh-CN" sz="1900" b="0" dirty="0">
+                <a:solidFill>
+                  <a:srgbClr val="262626"/>
+                </a:solidFill>
+                <a:latin typeface="Calibri"/>
+                <a:ea typeface="Microsoft YaHei"/>
+              </a:rPr>
+              <a:t>愿景：剪辑从操作软件，变成跟</a:t>
+            </a:r>
+            <a:r>
+              <a:rPr lang="zh-CN" sz="1900" b="1" dirty="0">
+                <a:solidFill>
+                  <a:srgbClr val="262626"/>
+                </a:solidFill>
+                <a:latin typeface="Calibri"/>
+                <a:ea typeface="Microsoft YaHei"/>
+              </a:rPr>
+              <a:t>懂你素材的 AI</a:t>
+            </a:r>
+            <a:r>
+              <a:rPr lang="zh-CN" sz="1900" b="0" dirty="0">
+                <a:solidFill>
+                  <a:srgbClr val="262626"/>
+                </a:solidFill>
+                <a:latin typeface="Calibri"/>
+                <a:ea typeface="Microsoft YaHei"/>
+              </a:rPr>
+              <a:t> 对话——从人操作设备，到</a:t>
             </a:r>
             <a:r>
               <a:rPr lang="zh-CN" sz="1900" b="1" dirty="0">
@@ -514,16 +1188,6 @@
                 <a:ea typeface="Microsoft YaHei"/>
               </a:rPr>
               <a:t>设备理解人</a:t>
-            </a:r>
-            <a:r>
-              <a:rPr lang="zh-CN" sz="1900" b="0" dirty="0">
-                <a:solidFill>
-                  <a:srgbClr val="262626"/>
-                </a:solidFill>
-                <a:latin typeface="Calibri"/>
-                <a:ea typeface="Microsoft YaHei"/>
-              </a:rPr>
-              <a:t>」</a:t>
             </a:r>
           </a:p>
         </p:txBody>
@@ -665,69 +1329,49 @@
                 <a:latin typeface="Calibri"/>
                 <a:ea typeface="Microsoft YaHei"/>
               </a:rPr>
-              <a:t>影石 360° 素材拍下的是</a:t>
-            </a:r>
-            <a:r>
-              <a:rPr lang="zh-CN" sz="1900" b="1" dirty="0">
-                <a:solidFill>
-                  <a:srgbClr val="262626"/>
-                </a:solidFill>
-                <a:latin typeface="Calibri"/>
-                <a:ea typeface="Microsoft YaHei"/>
-              </a:rPr>
-              <a:t>完整空间</a:t>
-            </a:r>
-            <a:r>
-              <a:rPr lang="zh-CN" sz="1900" b="0" dirty="0">
-                <a:solidFill>
-                  <a:srgbClr val="262626"/>
-                </a:solidFill>
-                <a:latin typeface="Calibri"/>
-                <a:ea typeface="Microsoft YaHei"/>
-              </a:rPr>
-              <a:t>，但产品只把它当「一段可观看的视频」</a:t>
-            </a:r>
-          </a:p>
-          <a:p>
-            <a:pPr algn="l">
-              <a:spcBef>
-                <a:spcPts val="0"/>
-              </a:spcBef>
-              <a:spcAft>
-                <a:spcPts val="700"/>
-              </a:spcAft>
-              <a:buFont typeface="Arial"/>
-              <a:buChar char="•"/>
-            </a:pPr>
-            <a:r>
-              <a:rPr lang="zh-CN" sz="1900" b="0" dirty="0">
-                <a:solidFill>
-                  <a:srgbClr val="262626"/>
-                </a:solidFill>
-                <a:latin typeface="Calibri"/>
-                <a:ea typeface="Microsoft YaHei"/>
-              </a:rPr>
-              <a:t>我们做 </a:t>
-            </a:r>
-            <a:r>
-              <a:rPr lang="zh-CN" sz="1900" b="1" dirty="0">
-                <a:solidFill>
-                  <a:srgbClr val="262626"/>
-                </a:solidFill>
-                <a:latin typeface="Calibri"/>
-                <a:ea typeface="Microsoft YaHei"/>
-              </a:rPr>
-              <a:t>AI Memory Space</a:t>
-            </a:r>
-            <a:r>
-              <a:rPr lang="zh-CN" sz="1900" b="0" dirty="0">
-                <a:solidFill>
-                  <a:srgbClr val="262626"/>
-                </a:solidFill>
-                <a:latin typeface="Calibri"/>
-                <a:ea typeface="Microsoft YaHei"/>
-              </a:rPr>
-              <a:t>：把 360° 素材变成</a:t>
+              <a:t>影石已有的 AI 剪辑（一键成片 / AI 导演）是</a:t>
+            </a:r>
+            <a:r>
+              <a:rPr lang="zh-CN" sz="1900" b="1" dirty="0">
+                <a:solidFill>
+                  <a:srgbClr val="262626"/>
+                </a:solidFill>
+                <a:latin typeface="Calibri"/>
+                <a:ea typeface="Microsoft YaHei"/>
+              </a:rPr>
+              <a:t>通用黑盒</a:t>
+            </a:r>
+            <a:r>
+              <a:rPr lang="zh-CN" sz="1900" b="0" dirty="0">
+                <a:solidFill>
+                  <a:srgbClr val="262626"/>
+                </a:solidFill>
+                <a:latin typeface="Calibri"/>
+                <a:ea typeface="Microsoft YaHei"/>
+              </a:rPr>
+              <a:t>：给你一条成片，不能问、不能改</a:t>
+            </a:r>
+          </a:p>
+          <a:p>
+            <a:pPr algn="l">
+              <a:spcBef>
+                <a:spcPts val="0"/>
+              </a:spcBef>
+              <a:spcAft>
+                <a:spcPts val="700"/>
+              </a:spcAft>
+              <a:buFont typeface="Arial"/>
+              <a:buChar char="•"/>
+            </a:pPr>
+            <a:r>
+              <a:rPr lang="zh-CN" sz="1900" b="0" dirty="0">
+                <a:solidFill>
+                  <a:srgbClr val="262626"/>
+                </a:solidFill>
+                <a:latin typeface="Calibri"/>
+                <a:ea typeface="Microsoft YaHei"/>
+              </a:rPr>
+              <a:t>忆境先把素材变成</a:t>
             </a:r>
             <a:r>
               <a:rPr lang="zh-CN" sz="1900" b="1" dirty="0">
@@ -739,69 +1383,109 @@
               </a:rPr>
               <a:t>可计算记忆</a:t>
             </a:r>
-          </a:p>
-          <a:p>
-            <a:pPr algn="l">
-              <a:spcBef>
-                <a:spcPts val="0"/>
-              </a:spcBef>
-              <a:spcAft>
-                <a:spcPts val="700"/>
-              </a:spcAft>
-              <a:buFont typeface="Arial"/>
-              <a:buChar char="•"/>
-            </a:pPr>
-            <a:r>
-              <a:rPr lang="zh-CN" sz="1900" b="0" dirty="0">
-                <a:solidFill>
-                  <a:srgbClr val="262626"/>
-                </a:solidFill>
-                <a:latin typeface="Calibri"/>
-                <a:ea typeface="Microsoft YaHei"/>
-              </a:rPr>
-              <a:t>「时间 + 空间 + 人物 + 事件」→ AI 理解你想留下什么、想怎样重新体验</a:t>
-            </a:r>
-          </a:p>
-          <a:p>
-            <a:pPr algn="l">
-              <a:spcBef>
-                <a:spcPts val="0"/>
-              </a:spcBef>
-              <a:spcAft>
-                <a:spcPts val="700"/>
-              </a:spcAft>
-              <a:buFont typeface="Arial"/>
-              <a:buChar char="•"/>
-            </a:pPr>
-            <a:r>
-              <a:rPr lang="zh-CN" sz="1900" b="0" dirty="0">
-                <a:solidFill>
-                  <a:srgbClr val="262626"/>
-                </a:solidFill>
-                <a:latin typeface="Calibri"/>
-                <a:ea typeface="Microsoft YaHei"/>
-              </a:rPr>
-              <a:t>把「可观看」升级为「</a:t>
-            </a:r>
-            <a:r>
-              <a:rPr lang="zh-CN" sz="1900" b="1" dirty="0">
-                <a:solidFill>
-                  <a:srgbClr val="262626"/>
-                </a:solidFill>
-                <a:latin typeface="Calibri"/>
-                <a:ea typeface="Microsoft YaHei"/>
-              </a:rPr>
-              <a:t>可进入</a:t>
-            </a:r>
-            <a:r>
-              <a:rPr lang="zh-CN" sz="1900" b="0" dirty="0">
-                <a:solidFill>
-                  <a:srgbClr val="262626"/>
-                </a:solidFill>
-                <a:latin typeface="Calibri"/>
-                <a:ea typeface="Microsoft YaHei"/>
-              </a:rPr>
-              <a:t>」</a:t>
+            <a:r>
+              <a:rPr lang="zh-CN" sz="1900" b="0" dirty="0">
+                <a:solidFill>
+                  <a:srgbClr val="262626"/>
+                </a:solidFill>
+                <a:latin typeface="Calibri"/>
+                <a:ea typeface="Microsoft YaHei"/>
+              </a:rPr>
+              <a:t>（时间 + 空间 + 人物 + 事件），AI 因此</a:t>
+            </a:r>
+            <a:r>
+              <a:rPr lang="zh-CN" sz="1900" b="1" dirty="0">
+                <a:solidFill>
+                  <a:srgbClr val="262626"/>
+                </a:solidFill>
+                <a:latin typeface="Calibri"/>
+                <a:ea typeface="Microsoft YaHei"/>
+              </a:rPr>
+              <a:t>懂你的素材</a:t>
+            </a:r>
+          </a:p>
+          <a:p>
+            <a:pPr algn="l">
+              <a:spcBef>
+                <a:spcPts val="0"/>
+              </a:spcBef>
+              <a:spcAft>
+                <a:spcPts val="700"/>
+              </a:spcAft>
+              <a:buFont typeface="Arial"/>
+              <a:buChar char="•"/>
+            </a:pPr>
+            <a:r>
+              <a:rPr lang="zh-CN" sz="1900" b="0" dirty="0">
+                <a:solidFill>
+                  <a:srgbClr val="262626"/>
+                </a:solidFill>
+                <a:latin typeface="Calibri"/>
+                <a:ea typeface="Microsoft YaHei"/>
+              </a:rPr>
+              <a:t>你用</a:t>
+            </a:r>
+            <a:r>
+              <a:rPr lang="zh-CN" sz="1900" b="1" dirty="0">
+                <a:solidFill>
+                  <a:srgbClr val="262626"/>
+                </a:solidFill>
+                <a:latin typeface="Calibri"/>
+                <a:ea typeface="Microsoft YaHei"/>
+              </a:rPr>
+              <a:t>一句话指挥剪辑</a:t>
+            </a:r>
+            <a:r>
+              <a:rPr lang="zh-CN" sz="1900" b="0" dirty="0">
+                <a:solidFill>
+                  <a:srgbClr val="262626"/>
+                </a:solidFill>
+                <a:latin typeface="Calibri"/>
+                <a:ea typeface="Microsoft YaHei"/>
+              </a:rPr>
+              <a:t>：「把三次起跳剪成 30 秒，用朋友在场的片段」</a:t>
+            </a:r>
+          </a:p>
+          <a:p>
+            <a:pPr algn="l">
+              <a:spcBef>
+                <a:spcPts val="0"/>
+              </a:spcBef>
+              <a:spcAft>
+                <a:spcPts val="700"/>
+              </a:spcAft>
+              <a:buFont typeface="Arial"/>
+              <a:buChar char="•"/>
+            </a:pPr>
+            <a:r>
+              <a:rPr lang="zh-CN" sz="1900" b="0" dirty="0">
+                <a:solidFill>
+                  <a:srgbClr val="262626"/>
+                </a:solidFill>
+                <a:latin typeface="Calibri"/>
+                <a:ea typeface="Microsoft YaHei"/>
+              </a:rPr>
+              <a:t>产出</a:t>
+            </a:r>
+            <a:r>
+              <a:rPr lang="zh-CN" sz="1900" b="1" dirty="0">
+                <a:solidFill>
+                  <a:srgbClr val="262626"/>
+                </a:solidFill>
+                <a:latin typeface="Calibri"/>
+                <a:ea typeface="Microsoft YaHei"/>
+              </a:rPr>
+              <a:t>可编辑时间轴</a:t>
+            </a:r>
+            <a:r>
+              <a:rPr lang="zh-CN" sz="1900" b="0" dirty="0">
+                <a:solidFill>
+                  <a:srgbClr val="262626"/>
+                </a:solidFill>
+                <a:latin typeface="Calibri"/>
+                <a:ea typeface="Microsoft YaHei"/>
+              </a:rPr>
+              <a:t>；记忆星系是工作台，空间重温是彩蛋</a:t>
             </a:r>
           </a:p>
         </p:txBody>
@@ -1179,30 +1863,20 @@
                 <a:latin typeface="Calibri"/>
                 <a:ea typeface="Microsoft YaHei"/>
               </a:rPr>
-              <a:t>AI 导演 / 一键成片 2.0 · PanoMind 30+ 场景 · 手势 / 语音</a:t>
-            </a:r>
-          </a:p>
-          <a:p>
-            <a:pPr algn="l">
-              <a:spcBef>
-                <a:spcPts val="0"/>
-              </a:spcBef>
-              <a:spcAft>
-                <a:spcPts val="700"/>
-              </a:spcAft>
-              <a:buFont typeface="Arial"/>
-              <a:buChar char="•"/>
-            </a:pPr>
-            <a:r>
-              <a:rPr lang="zh-CN" sz="1900" b="0" dirty="0">
-                <a:solidFill>
-                  <a:srgbClr val="262626"/>
-                </a:solidFill>
-                <a:latin typeface="Calibri"/>
-                <a:ea typeface="Microsoft YaHei"/>
-              </a:rPr>
-              <a:t>3D 时光舱（3DGS）—— </a:t>
-            </a:r>
+              <a:t>AI 导演 / 一键成片 2.0 · PanoMind 30+ 场景 · 手势 / 语音 · 3D 时光舱</a:t>
+            </a:r>
+          </a:p>
+          <a:p>
+            <a:pPr algn="l">
+              <a:spcBef>
+                <a:spcPts val="0"/>
+              </a:spcBef>
+              <a:spcAft>
+                <a:spcPts val="700"/>
+              </a:spcAft>
+              <a:buFont typeface="Arial"/>
+              <a:buChar char="•"/>
+            </a:pPr>
             <a:r>
               <a:rPr lang="zh-CN" sz="1900" b="1" dirty="0">
                 <a:solidFill>
@@ -1213,69 +1887,109 @@
               </a:rPr>
               <a:t>X6 首发、X5 已几乎全部下放</a:t>
             </a:r>
-          </a:p>
-          <a:p>
-            <a:pPr algn="l">
-              <a:spcBef>
-                <a:spcPts val="0"/>
-              </a:spcBef>
-              <a:spcAft>
-                <a:spcPts val="700"/>
-              </a:spcAft>
-              <a:buFont typeface="Arial"/>
-              <a:buChar char="•"/>
-            </a:pPr>
-            <a:r>
-              <a:rPr lang="zh-CN" sz="1900" b="0" dirty="0">
-                <a:solidFill>
-                  <a:srgbClr val="262626"/>
-                </a:solidFill>
-                <a:latin typeface="Calibri"/>
-                <a:ea typeface="Microsoft YaHei"/>
-              </a:rPr>
-              <a:t>→ 但全停在同一层：</a:t>
-            </a:r>
-            <a:r>
-              <a:rPr lang="zh-CN" sz="1900" b="1" dirty="0">
-                <a:solidFill>
-                  <a:srgbClr val="262626"/>
-                </a:solidFill>
-                <a:latin typeface="Calibri"/>
-                <a:ea typeface="Microsoft YaHei"/>
-              </a:rPr>
-              <a:t>通用黑盒 + 事后离线 + 单设备 + 不可交互</a:t>
-            </a:r>
-          </a:p>
-          <a:p>
-            <a:pPr algn="l">
-              <a:spcBef>
-                <a:spcPts val="0"/>
-              </a:spcBef>
-              <a:spcAft>
-                <a:spcPts val="700"/>
-              </a:spcAft>
-              <a:buFont typeface="Arial"/>
-              <a:buChar char="•"/>
-            </a:pPr>
-            <a:r>
-              <a:rPr lang="zh-CN" sz="1900" b="0" dirty="0">
-                <a:solidFill>
-                  <a:srgbClr val="262626"/>
-                </a:solidFill>
-                <a:latin typeface="Calibri"/>
-                <a:ea typeface="Microsoft YaHei"/>
-              </a:rPr>
-              <a:t>→ 所以不做单点功能，只做它们之上的</a:t>
-            </a:r>
-            <a:r>
-              <a:rPr lang="zh-CN" sz="1900" b="1" dirty="0">
-                <a:solidFill>
-                  <a:srgbClr val="262626"/>
-                </a:solidFill>
-                <a:latin typeface="Calibri"/>
-                <a:ea typeface="Microsoft YaHei"/>
-              </a:rPr>
-              <a:t>记忆层</a:t>
+            <a:r>
+              <a:rPr lang="zh-CN" sz="1900" b="0" dirty="0">
+                <a:solidFill>
+                  <a:srgbClr val="262626"/>
+                </a:solidFill>
+                <a:latin typeface="Calibri"/>
+                <a:ea typeface="Microsoft YaHei"/>
+              </a:rPr>
+              <a:t>——但全停在同一层：</a:t>
+            </a:r>
+            <a:r>
+              <a:rPr lang="zh-CN" sz="1900" b="1" dirty="0">
+                <a:solidFill>
+                  <a:srgbClr val="262626"/>
+                </a:solidFill>
+                <a:latin typeface="Calibri"/>
+                <a:ea typeface="Microsoft YaHei"/>
+              </a:rPr>
+              <a:t>通用黑盒 + 不可交互</a:t>
+            </a:r>
+          </a:p>
+          <a:p>
+            <a:pPr algn="l">
+              <a:spcBef>
+                <a:spcPts val="0"/>
+              </a:spcBef>
+              <a:spcAft>
+                <a:spcPts val="700"/>
+              </a:spcAft>
+              <a:buFont typeface="Arial"/>
+              <a:buChar char="•"/>
+            </a:pPr>
+            <a:r>
+              <a:rPr lang="zh-CN" sz="1900" b="0" dirty="0">
+                <a:solidFill>
+                  <a:srgbClr val="262626"/>
+                </a:solidFill>
+                <a:latin typeface="Calibri"/>
+                <a:ea typeface="Microsoft YaHei"/>
+              </a:rPr>
+              <a:t>影石已有的是「一键」，用户要的是「</a:t>
+            </a:r>
+            <a:r>
+              <a:rPr lang="zh-CN" sz="1900" b="1" dirty="0">
+                <a:solidFill>
+                  <a:srgbClr val="262626"/>
+                </a:solidFill>
+                <a:latin typeface="Calibri"/>
+                <a:ea typeface="Microsoft YaHei"/>
+              </a:rPr>
+              <a:t>听我的</a:t>
+            </a:r>
+            <a:r>
+              <a:rPr lang="zh-CN" sz="1900" b="0" dirty="0">
+                <a:solidFill>
+                  <a:srgbClr val="262626"/>
+                </a:solidFill>
+                <a:latin typeface="Calibri"/>
+                <a:ea typeface="Microsoft YaHei"/>
+              </a:rPr>
+              <a:t>」</a:t>
+            </a:r>
+          </a:p>
+          <a:p>
+            <a:pPr algn="l">
+              <a:spcBef>
+                <a:spcPts val="0"/>
+              </a:spcBef>
+              <a:spcAft>
+                <a:spcPts val="700"/>
+              </a:spcAft>
+              <a:buFont typeface="Arial"/>
+              <a:buChar char="•"/>
+            </a:pPr>
+            <a:r>
+              <a:rPr lang="zh-CN" sz="1900" b="0" dirty="0">
+                <a:solidFill>
+                  <a:srgbClr val="262626"/>
+                </a:solidFill>
+                <a:latin typeface="Calibri"/>
+                <a:ea typeface="Microsoft YaHei"/>
+              </a:rPr>
+              <a:t>我们做</a:t>
+            </a:r>
+            <a:r>
+              <a:rPr lang="zh-CN" sz="1900" b="1" dirty="0">
+                <a:solidFill>
+                  <a:srgbClr val="262626"/>
+                </a:solidFill>
+                <a:latin typeface="Calibri"/>
+                <a:ea typeface="Microsoft YaHei"/>
+              </a:rPr>
+              <a:t>可指挥的记忆层</a:t>
+            </a:r>
+            <a:r>
+              <a:rPr lang="zh-CN" sz="1900" b="0" dirty="0">
+                <a:solidFill>
+                  <a:srgbClr val="262626"/>
+                </a:solidFill>
+                <a:latin typeface="Calibri"/>
+                <a:ea typeface="Microsoft YaHei"/>
+              </a:rPr>
+              <a:t>：素材在哪、谁在场、哪一刻最好，AI 都知道</a:t>
             </a:r>
           </a:p>
         </p:txBody>
@@ -1471,7 +2185,49 @@
                 <a:latin typeface="Calibri"/>
                 <a:ea typeface="Microsoft YaHei"/>
               </a:rPr>
-              <a:t>不是「只有影石能做」，而是「影石</a:t>
+              <a:t>「朋友在场的片段」这类指令，只有理解</a:t>
+            </a:r>
+            <a:r>
+              <a:rPr lang="zh-CN" sz="1900" b="1" dirty="0">
+                <a:solidFill>
+                  <a:srgbClr val="262626"/>
+                </a:solidFill>
+                <a:latin typeface="Calibri"/>
+                <a:ea typeface="Microsoft YaHei"/>
+              </a:rPr>
+              <a:t>空间</a:t>
+            </a:r>
+            <a:r>
+              <a:rPr lang="zh-CN" sz="1900" b="0" dirty="0">
+                <a:solidFill>
+                  <a:srgbClr val="262626"/>
+                </a:solidFill>
+                <a:latin typeface="Calibri"/>
+                <a:ea typeface="Microsoft YaHei"/>
+              </a:rPr>
+              <a:t>的 AI 听得懂</a:t>
+            </a:r>
+          </a:p>
+          <a:p>
+            <a:pPr algn="l">
+              <a:spcBef>
+                <a:spcPts val="0"/>
+              </a:spcBef>
+              <a:spcAft>
+                <a:spcPts val="700"/>
+              </a:spcAft>
+              <a:buFont typeface="Arial"/>
+              <a:buChar char="•"/>
+            </a:pPr>
+            <a:r>
+              <a:rPr lang="zh-CN" sz="1900" b="0" dirty="0">
+                <a:solidFill>
+                  <a:srgbClr val="262626"/>
+                </a:solidFill>
+                <a:latin typeface="Calibri"/>
+                <a:ea typeface="Microsoft YaHei"/>
+              </a:rPr>
+              <a:t>影石</a:t>
             </a:r>
             <a:r>
               <a:rPr lang="zh-CN" sz="1900" b="1" dirty="0">
@@ -1491,39 +2247,7 @@
                 <a:latin typeface="Calibri"/>
                 <a:ea typeface="Microsoft YaHei"/>
               </a:rPr>
-              <a:t>大规模、连续、360° 空间数据」</a:t>
-            </a:r>
-          </a:p>
-          <a:p>
-            <a:pPr algn="l">
-              <a:spcBef>
-                <a:spcPts val="0"/>
-              </a:spcBef>
-              <a:spcAft>
-                <a:spcPts val="700"/>
-              </a:spcAft>
-              <a:buFont typeface="Arial"/>
-              <a:buChar char="•"/>
-            </a:pPr>
-            <a:r>
-              <a:rPr lang="zh-CN" sz="1900" b="0" dirty="0">
-                <a:solidFill>
-                  <a:srgbClr val="262626"/>
-                </a:solidFill>
-                <a:latin typeface="Calibri"/>
-                <a:ea typeface="Microsoft YaHei"/>
-              </a:rPr>
-              <a:t>→ 空间记忆重构是影石</a:t>
-            </a:r>
-            <a:r>
-              <a:rPr lang="zh-CN" sz="1900" b="1" dirty="0">
-                <a:solidFill>
-                  <a:srgbClr val="262626"/>
-                </a:solidFill>
-                <a:latin typeface="Calibri"/>
-                <a:ea typeface="Microsoft YaHei"/>
-              </a:rPr>
-              <a:t>最自然的延伸</a:t>
+              <a:t>大规模、连续、360° 空间数据——这是最自然的延伸</a:t>
             </a:r>
           </a:p>
         </p:txBody>
@@ -1665,7 +2389,7 @@
                 <a:latin typeface="Calibri"/>
                 <a:ea typeface="Microsoft YaHei"/>
               </a:rPr>
-              <a:t>理解环境：这是雪山 / 人 / 滑雪 / 起跳 —— </a:t>
+              <a:t>理解环境：雪山 / 人 / 滑雪 / 起跳 —— </a:t>
             </a:r>
             <a:r>
               <a:rPr lang="zh-CN" sz="1900" b="1" dirty="0">
@@ -1707,27 +2431,27 @@
                 <a:latin typeface="Calibri"/>
                 <a:ea typeface="Microsoft YaHei"/>
               </a:rPr>
-              <a:t>理解意图：我想怎么表达 —— </a:t>
-            </a:r>
-            <a:r>
-              <a:rPr lang="zh-CN" sz="1900" b="1" dirty="0">
-                <a:solidFill>
-                  <a:srgbClr val="262626"/>
-                </a:solidFill>
-                <a:latin typeface="Calibri"/>
-                <a:ea typeface="Microsoft YaHei"/>
-              </a:rPr>
-              <a:t>Intent Director</a:t>
-            </a:r>
-            <a:r>
-              <a:rPr lang="zh-CN" sz="1900" b="0" dirty="0">
-                <a:solidFill>
-                  <a:srgbClr val="262626"/>
-                </a:solidFill>
-                <a:latin typeface="Calibri"/>
-                <a:ea typeface="Microsoft YaHei"/>
-              </a:rPr>
-              <a:t>（「朋友站在哪里」）</a:t>
+              <a:t>理解意图：我想怎么剪 —— </a:t>
+            </a:r>
+            <a:r>
+              <a:rPr lang="zh-CN" sz="1900" b="1" dirty="0">
+                <a:solidFill>
+                  <a:srgbClr val="262626"/>
+                </a:solidFill>
+                <a:latin typeface="Calibri"/>
+                <a:ea typeface="Microsoft YaHei"/>
+              </a:rPr>
+              <a:t>一句话指挥</a:t>
+            </a:r>
+            <a:r>
+              <a:rPr lang="zh-CN" sz="1900" b="0" dirty="0">
+                <a:solidFill>
+                  <a:srgbClr val="262626"/>
+                </a:solidFill>
+                <a:latin typeface="Calibri"/>
+                <a:ea typeface="Microsoft YaHei"/>
+              </a:rPr>
+              <a:t>（「用朋友在场的片段」）</a:t>
             </a:r>
           </a:p>
           <a:p>
@@ -1791,7 +2515,7 @@
                 <a:latin typeface="Calibri"/>
                 <a:ea typeface="Microsoft YaHei"/>
               </a:rPr>
-              <a:t>三层合流 → AI Memory Space → 空间体验</a:t>
+              <a:t>三层合流 → 忆境 → 懂素材的剪辑</a:t>
             </a:r>
           </a:p>
         </p:txBody>
@@ -1860,7 +2584,7 @@
                 <a:latin typeface="Calibri"/>
                 <a:ea typeface="Microsoft YaHei"/>
               </a:rPr>
-              <a:t>Demo 主线（6 步）</a:t>
+              <a:t>记忆星系：剪辑工作台</a:t>
             </a:r>
           </a:p>
         </p:txBody>
@@ -1926,112 +2650,100 @@
               <a:buChar char="•"/>
             </a:pPr>
             <a:r>
-              <a:rPr lang="zh-CN" sz="1900" b="0" dirty="0">
-                <a:solidFill>
-                  <a:srgbClr val="262626"/>
-                </a:solidFill>
-                <a:latin typeface="Calibri"/>
-                <a:ea typeface="Microsoft YaHei"/>
-              </a:rPr>
-              <a:t>AI 理解：识别 3 次滑雪 / 2 次旅行 / 1 次聚会</a:t>
-            </a:r>
-          </a:p>
-          <a:p>
-            <a:pPr algn="l">
-              <a:spcBef>
-                <a:spcPts val="0"/>
-              </a:spcBef>
-              <a:spcAft>
-                <a:spcPts val="700"/>
-              </a:spcAft>
-              <a:buFont typeface="Arial"/>
-              <a:buChar char="•"/>
-            </a:pPr>
-            <a:r>
-              <a:rPr lang="zh-CN" sz="1900" b="0" dirty="0">
-                <a:solidFill>
-                  <a:srgbClr val="262626"/>
-                </a:solidFill>
-                <a:latin typeface="Calibri"/>
-                <a:ea typeface="Microsoft YaHei"/>
-              </a:rPr>
-              <a:t>AI 精选：今天 7 个值得留下的瞬间 → 点「山顶夕阳」</a:t>
-            </a:r>
-          </a:p>
-          <a:p>
-            <a:pPr algn="l">
-              <a:spcBef>
-                <a:spcPts val="0"/>
-              </a:spcBef>
-              <a:spcAft>
-                <a:spcPts val="700"/>
-              </a:spcAft>
-              <a:buFont typeface="Arial"/>
-              <a:buChar char="•"/>
-            </a:pPr>
-            <a:r>
-              <a:rPr lang="zh-CN" sz="1900" b="0" dirty="0">
-                <a:solidFill>
-                  <a:srgbClr val="262626"/>
-                </a:solidFill>
-                <a:latin typeface="Calibri"/>
-                <a:ea typeface="Microsoft YaHei"/>
-              </a:rPr>
-              <a:t>空间记忆：时间点 → Memory Scene（事件 + 空间 + 主体）</a:t>
-            </a:r>
-          </a:p>
-          <a:p>
-            <a:pPr algn="l">
-              <a:spcBef>
-                <a:spcPts val="0"/>
-              </a:spcBef>
-              <a:spcAft>
-                <a:spcPts val="700"/>
-              </a:spcAft>
-              <a:buFont typeface="Arial"/>
-              <a:buChar char="•"/>
-            </a:pPr>
-            <a:r>
-              <a:rPr lang="zh-CN" sz="1900" b="0" dirty="0">
-                <a:solidFill>
-                  <a:srgbClr val="262626"/>
-                </a:solidFill>
-                <a:latin typeface="Calibri"/>
-                <a:ea typeface="Microsoft YaHei"/>
-              </a:rPr>
-              <a:t>手势进入：抓取 → 拉近 → 旋转</a:t>
-            </a:r>
-          </a:p>
-          <a:p>
-            <a:pPr algn="l">
-              <a:spcBef>
-                <a:spcPts val="0"/>
-              </a:spcBef>
-              <a:spcAft>
-                <a:spcPts val="700"/>
-              </a:spcAft>
-              <a:buFont typeface="Arial"/>
-              <a:buChar char="•"/>
-            </a:pPr>
-            <a:r>
-              <a:rPr lang="zh-CN" sz="1900" b="1" dirty="0">
-                <a:solidFill>
-                  <a:srgbClr val="262626"/>
-                </a:solidFill>
-                <a:latin typeface="Calibri"/>
-                <a:ea typeface="Microsoft YaHei"/>
-              </a:rPr>
-              <a:t>高潮</a:t>
-            </a:r>
-            <a:r>
-              <a:rPr lang="zh-CN" sz="1900" b="0" dirty="0">
-                <a:solidFill>
-                  <a:srgbClr val="262626"/>
-                </a:solidFill>
-                <a:latin typeface="Calibri"/>
-                <a:ea typeface="Microsoft YaHei"/>
-              </a:rPr>
-              <a:t>：一句话「当时我朋友站在哪里？」→ AI 从 360° 数据定位 → 镜头转向</a:t>
+              <a:rPr lang="zh-CN" sz="1900" b="1" dirty="0">
+                <a:solidFill>
+                  <a:srgbClr val="262626"/>
+                </a:solidFill>
+                <a:latin typeface="Calibri"/>
+                <a:ea typeface="Microsoft YaHei"/>
+              </a:rPr>
+              <a:t>记忆星系（宏观）</a:t>
+            </a:r>
+            <a:r>
+              <a:rPr lang="zh-CN" sz="1900" b="0" dirty="0">
+                <a:solidFill>
+                  <a:srgbClr val="262626"/>
+                </a:solidFill>
+                <a:latin typeface="Calibri"/>
+                <a:ea typeface="Microsoft YaHei"/>
+              </a:rPr>
+              <a:t>：全部素材的可导航索引，每颗星是一段时刻——在这里决定「剪什么」</a:t>
+            </a:r>
+          </a:p>
+          <a:p>
+            <a:pPr algn="l">
+              <a:spcBef>
+                <a:spcPts val="0"/>
+              </a:spcBef>
+              <a:spcAft>
+                <a:spcPts val="700"/>
+              </a:spcAft>
+              <a:buFont typeface="Arial"/>
+              <a:buChar char="•"/>
+            </a:pPr>
+            <a:r>
+              <a:rPr lang="zh-CN" sz="1900" b="0" dirty="0">
+                <a:solidFill>
+                  <a:srgbClr val="262626"/>
+                </a:solidFill>
+                <a:latin typeface="Calibri"/>
+                <a:ea typeface="Microsoft YaHei"/>
+              </a:rPr>
+              <a:t>手势漫游：抓取 = 选择 · 拉近 = 预览 · 旋转 = 环视</a:t>
+            </a:r>
+          </a:p>
+          <a:p>
+            <a:pPr algn="l">
+              <a:spcBef>
+                <a:spcPts val="0"/>
+              </a:spcBef>
+              <a:spcAft>
+                <a:spcPts val="700"/>
+              </a:spcAft>
+              <a:buFont typeface="Arial"/>
+              <a:buChar char="•"/>
+            </a:pPr>
+            <a:r>
+              <a:rPr lang="zh-CN" sz="1900" b="1" dirty="0">
+                <a:solidFill>
+                  <a:srgbClr val="262626"/>
+                </a:solidFill>
+                <a:latin typeface="Calibri"/>
+                <a:ea typeface="Microsoft YaHei"/>
+              </a:rPr>
+              <a:t>记忆场景（微观）</a:t>
+            </a:r>
+            <a:r>
+              <a:rPr lang="zh-CN" sz="1900" b="0" dirty="0">
+                <a:solidFill>
+                  <a:srgbClr val="262626"/>
+                </a:solidFill>
+                <a:latin typeface="Calibri"/>
+                <a:ea typeface="Microsoft YaHei"/>
+              </a:rPr>
+              <a:t>：进入一颗星，回到那一刻的 360° 空间——在这里确认「就是这段」</a:t>
+            </a:r>
+          </a:p>
+          <a:p>
+            <a:pPr algn="l">
+              <a:spcBef>
+                <a:spcPts val="0"/>
+              </a:spcBef>
+              <a:spcAft>
+                <a:spcPts val="700"/>
+              </a:spcAft>
+              <a:buFont typeface="Arial"/>
+              <a:buChar char="•"/>
+            </a:pPr>
+            <a:r>
+              <a:rPr lang="zh-CN" sz="1900" b="0" dirty="0">
+                <a:solidFill>
+                  <a:srgbClr val="262626"/>
+                </a:solidFill>
+                <a:latin typeface="Calibri"/>
+                <a:ea typeface="Microsoft YaHei"/>
+              </a:rPr>
+              <a:t>选材在星系，取材在场景，剪辑在时间轴</a:t>
             </a:r>
           </a:p>
         </p:txBody>
@@ -2100,7 +2812,7 @@
                 <a:latin typeface="Calibri"/>
                 <a:ea typeface="Microsoft YaHei"/>
               </a:rPr>
-              <a:t>技术架构（语义与审美分离）</a:t>
+              <a:t>Demo 主线（6 步）</a:t>
             </a:r>
           </a:p>
         </p:txBody>
@@ -2173,155 +2885,135 @@
                 <a:latin typeface="Calibri"/>
                 <a:ea typeface="Microsoft YaHei"/>
               </a:rPr>
-              <a:t>空间事件理解层：Event Timeline + Spatial Map + Subject Track</a:t>
-            </a:r>
-          </a:p>
-          <a:p>
-            <a:pPr algn="l">
-              <a:spcBef>
-                <a:spcPts val="0"/>
-              </a:spcBef>
-              <a:spcAft>
-                <a:spcPts val="700"/>
-              </a:spcAft>
-              <a:buFont typeface="Arial"/>
-              <a:buChar char="•"/>
-            </a:pPr>
-            <a:r>
-              <a:rPr lang="zh-CN" sz="1900" b="0" dirty="0">
-                <a:solidFill>
-                  <a:srgbClr val="262626"/>
-                </a:solidFill>
-                <a:latin typeface="Calibri"/>
-                <a:ea typeface="Microsoft YaHei"/>
-              </a:rPr>
-              <a:t>意图 / 查询层 · VLM → query.json（</a:t>
-            </a:r>
-            <a:r>
-              <a:rPr lang="zh-CN" sz="1900" b="1" dirty="0">
-                <a:solidFill>
-                  <a:srgbClr val="262626"/>
-                </a:solidFill>
-                <a:latin typeface="Calibri"/>
-                <a:ea typeface="Microsoft YaHei"/>
-              </a:rPr>
-              <a:t>白名单 Schema，仅枚举值</a:t>
-            </a:r>
-            <a:r>
-              <a:rPr lang="zh-CN" sz="1900" b="0" dirty="0">
-                <a:solidFill>
-                  <a:srgbClr val="262626"/>
-                </a:solidFill>
-                <a:latin typeface="Calibri"/>
-                <a:ea typeface="Microsoft YaHei"/>
-              </a:rPr>
-              <a:t>）</a:t>
-            </a:r>
-          </a:p>
-          <a:p>
-            <a:pPr algn="l">
-              <a:spcBef>
-                <a:spcPts val="0"/>
-              </a:spcBef>
-              <a:spcAft>
-                <a:spcPts val="700"/>
-              </a:spcAft>
-              <a:buFont typeface="Arial"/>
-              <a:buChar char="•"/>
-            </a:pPr>
-            <a:r>
-              <a:rPr lang="zh-CN" sz="1900" b="0" dirty="0">
-                <a:solidFill>
-                  <a:srgbClr val="262626"/>
-                </a:solidFill>
-                <a:latin typeface="Calibri"/>
-                <a:ea typeface="Microsoft YaHei"/>
-              </a:rPr>
-              <a:t>记忆精选层：选 / 删 / 藏 → 偏好权重（</a:t>
-            </a:r>
-            <a:r>
-              <a:rPr lang="zh-CN" sz="1900" b="1" dirty="0">
-                <a:solidFill>
-                  <a:srgbClr val="262626"/>
-                </a:solidFill>
-                <a:latin typeface="Calibri"/>
-                <a:ea typeface="Microsoft YaHei"/>
-              </a:rPr>
-              <a:t>不做人格测试</a:t>
-            </a:r>
-            <a:r>
-              <a:rPr lang="zh-CN" sz="1900" b="0" dirty="0">
-                <a:solidFill>
-                  <a:srgbClr val="262626"/>
-                </a:solidFill>
-                <a:latin typeface="Calibri"/>
-                <a:ea typeface="Microsoft YaHei"/>
-              </a:rPr>
-              <a:t>）</a:t>
-            </a:r>
-          </a:p>
-          <a:p>
-            <a:pPr algn="l">
-              <a:spcBef>
-                <a:spcPts val="0"/>
-              </a:spcBef>
-              <a:spcAft>
-                <a:spcPts val="700"/>
-              </a:spcAft>
-              <a:buFont typeface="Arial"/>
-              <a:buChar char="•"/>
-            </a:pPr>
-            <a:r>
-              <a:rPr lang="zh-CN" sz="1900" b="0" dirty="0">
-                <a:solidFill>
-                  <a:srgbClr val="262626"/>
-                </a:solidFill>
-                <a:latin typeface="Calibri"/>
-                <a:ea typeface="Microsoft YaHei"/>
-              </a:rPr>
-              <a:t>空间重构层：深度 / 视差 / 3DGS → 可导航空间</a:t>
-            </a:r>
-          </a:p>
-          <a:p>
-            <a:pPr algn="l">
-              <a:spcBef>
-                <a:spcPts val="0"/>
-              </a:spcBef>
-              <a:spcAft>
-                <a:spcPts val="700"/>
-              </a:spcAft>
-              <a:buFont typeface="Arial"/>
-              <a:buChar char="•"/>
-            </a:pPr>
-            <a:r>
-              <a:rPr lang="zh-CN" sz="1900" b="0" dirty="0">
-                <a:solidFill>
-                  <a:srgbClr val="262626"/>
-                </a:solidFill>
-                <a:latin typeface="Calibri"/>
-                <a:ea typeface="Microsoft YaHei"/>
-              </a:rPr>
-              <a:t>关键：</a:t>
-            </a:r>
-            <a:r>
-              <a:rPr lang="zh-CN" sz="1900" b="1" dirty="0">
-                <a:solidFill>
-                  <a:srgbClr val="262626"/>
-                </a:solidFill>
-                <a:latin typeface="Calibri"/>
-                <a:ea typeface="Microsoft YaHei"/>
-              </a:rPr>
-              <a:t>VLM 不进实时环</a:t>
-            </a:r>
-            <a:r>
-              <a:rPr lang="zh-CN" sz="1900" b="0" dirty="0">
-                <a:solidFill>
-                  <a:srgbClr val="262626"/>
-                </a:solidFill>
-                <a:latin typeface="Calibri"/>
-                <a:ea typeface="Microsoft YaHei"/>
-              </a:rPr>
-              <a:t>，下游全确定性、秒级重跑</a:t>
+              <a:t>AI 理解素材：3 次滑雪 / 2 次旅行 / 1 次聚会，汇成记忆星系</a:t>
+            </a:r>
+          </a:p>
+          <a:p>
+            <a:pPr algn="l">
+              <a:spcBef>
+                <a:spcPts val="0"/>
+              </a:spcBef>
+              <a:spcAft>
+                <a:spcPts val="700"/>
+              </a:spcAft>
+              <a:buFont typeface="Arial"/>
+              <a:buChar char="•"/>
+            </a:pPr>
+            <a:r>
+              <a:rPr lang="zh-CN" sz="1900" b="1" dirty="0">
+                <a:solidFill>
+                  <a:srgbClr val="262626"/>
+                </a:solidFill>
+                <a:latin typeface="Calibri"/>
+                <a:ea typeface="Microsoft YaHei"/>
+              </a:rPr>
+              <a:t>一句话指挥</a:t>
+            </a:r>
+            <a:r>
+              <a:rPr lang="zh-CN" sz="1900" b="0" dirty="0">
+                <a:solidFill>
+                  <a:srgbClr val="262626"/>
+                </a:solidFill>
+                <a:latin typeface="Calibri"/>
+                <a:ea typeface="Microsoft YaHei"/>
+              </a:rPr>
+              <a:t>：「把三次起跳剪成 30 秒，用朋友在场的片段」</a:t>
+            </a:r>
+          </a:p>
+          <a:p>
+            <a:pPr algn="l">
+              <a:spcBef>
+                <a:spcPts val="0"/>
+              </a:spcBef>
+              <a:spcAft>
+                <a:spcPts val="700"/>
+              </a:spcAft>
+              <a:buFont typeface="Arial"/>
+              <a:buChar char="•"/>
+            </a:pPr>
+            <a:r>
+              <a:rPr lang="zh-CN" sz="1900" b="0" dirty="0">
+                <a:solidFill>
+                  <a:srgbClr val="262626"/>
+                </a:solidFill>
+                <a:latin typeface="Calibri"/>
+                <a:ea typeface="Microsoft YaHei"/>
+              </a:rPr>
+              <a:t>AI 从记忆索引取材 → </a:t>
+            </a:r>
+            <a:r>
+              <a:rPr lang="zh-CN" sz="1900" b="1" dirty="0">
+                <a:solidFill>
+                  <a:srgbClr val="262626"/>
+                </a:solidFill>
+                <a:latin typeface="Calibri"/>
+                <a:ea typeface="Microsoft YaHei"/>
+              </a:rPr>
+              <a:t>可编辑时间轴</a:t>
+            </a:r>
+            <a:r>
+              <a:rPr lang="zh-CN" sz="1900" b="0" dirty="0">
+                <a:solidFill>
+                  <a:srgbClr val="262626"/>
+                </a:solidFill>
+                <a:latin typeface="Calibri"/>
+                <a:ea typeface="Microsoft YaHei"/>
+              </a:rPr>
+              <a:t>：换素材、改节奏，点选即改</a:t>
+            </a:r>
+          </a:p>
+          <a:p>
+            <a:pPr algn="l">
+              <a:spcBef>
+                <a:spcPts val="0"/>
+              </a:spcBef>
+              <a:spcAft>
+                <a:spcPts val="700"/>
+              </a:spcAft>
+              <a:buFont typeface="Arial"/>
+              <a:buChar char="•"/>
+            </a:pPr>
+            <a:r>
+              <a:rPr lang="zh-CN" sz="1900" b="1" dirty="0">
+                <a:solidFill>
+                  <a:srgbClr val="262626"/>
+                </a:solidFill>
+                <a:latin typeface="Calibri"/>
+                <a:ea typeface="Microsoft YaHei"/>
+              </a:rPr>
+              <a:t>高潮</a:t>
+            </a:r>
+            <a:r>
+              <a:rPr lang="zh-CN" sz="1900" b="0" dirty="0">
+                <a:solidFill>
+                  <a:srgbClr val="262626"/>
+                </a:solidFill>
+                <a:latin typeface="Calibri"/>
+                <a:ea typeface="Microsoft YaHei"/>
+              </a:rPr>
+              <a:t>：「当时我朋友站在哪里？」→ 360° 定位 → 镜头转向 → 正是剪进片子的那一幕</a:t>
+            </a:r>
+          </a:p>
+          <a:p>
+            <a:pPr algn="l">
+              <a:spcBef>
+                <a:spcPts val="0"/>
+              </a:spcBef>
+              <a:spcAft>
+                <a:spcPts val="700"/>
+              </a:spcAft>
+              <a:buFont typeface="Arial"/>
+              <a:buChar char="•"/>
+            </a:pPr>
+            <a:r>
+              <a:rPr lang="zh-CN" sz="1900" b="0" dirty="0">
+                <a:solidFill>
+                  <a:srgbClr val="262626"/>
+                </a:solidFill>
+                <a:latin typeface="Calibri"/>
+                <a:ea typeface="Microsoft YaHei"/>
+              </a:rPr>
+              <a:t>产出：一条成片 + 一份可进入的空间记忆</a:t>
             </a:r>
           </a:p>
         </p:txBody>
@@ -2390,7 +3082,7 @@
                 <a:latin typeface="Calibri"/>
                 <a:ea typeface="Microsoft YaHei"/>
               </a:rPr>
-              <a:t>48h 路线图（含自评线）</a:t>
+              <a:t>项目重点（P0 / P1 / P2）</a:t>
             </a:r>
           </a:p>
         </p:txBody>
@@ -2456,162 +3148,110 @@
               <a:buChar char="•"/>
             </a:pPr>
             <a:r>
-              <a:rPr lang="zh-CN" sz="1900" b="0" dirty="0">
-                <a:solidFill>
-                  <a:srgbClr val="262626"/>
-                </a:solidFill>
-                <a:latin typeface="Calibri"/>
-                <a:ea typeface="Microsoft YaHei"/>
-              </a:rPr>
-              <a:t>M0 · 0–6h：素材 + Schema（</a:t>
-            </a:r>
-            <a:r>
-              <a:rPr lang="zh-CN" sz="1900" b="1" dirty="0">
-                <a:solidFill>
-                  <a:srgbClr val="262626"/>
-                </a:solidFill>
-                <a:latin typeface="Calibri"/>
-                <a:ea typeface="Microsoft YaHei"/>
-              </a:rPr>
-              <a:t>100% 合法 JSON</a:t>
-            </a:r>
-            <a:r>
-              <a:rPr lang="zh-CN" sz="1900" b="0" dirty="0">
-                <a:solidFill>
-                  <a:srgbClr val="262626"/>
-                </a:solidFill>
-                <a:latin typeface="Calibri"/>
-                <a:ea typeface="Microsoft YaHei"/>
-              </a:rPr>
-              <a:t>）</a:t>
-            </a:r>
-          </a:p>
-          <a:p>
-            <a:pPr algn="l">
-              <a:spcBef>
-                <a:spcPts val="0"/>
-              </a:spcBef>
-              <a:spcAft>
-                <a:spcPts val="700"/>
-              </a:spcAft>
-              <a:buFont typeface="Arial"/>
-              <a:buChar char="•"/>
-            </a:pPr>
-            <a:r>
-              <a:rPr lang="zh-CN" sz="1900" b="0" dirty="0">
-                <a:solidFill>
-                  <a:srgbClr val="262626"/>
-                </a:solidFill>
-                <a:latin typeface="Calibri"/>
-                <a:ea typeface="Microsoft YaHei"/>
-              </a:rPr>
-              <a:t>M1 · 6–18h：空间事件理解（</a:t>
-            </a:r>
-            <a:r>
-              <a:rPr lang="zh-CN" sz="1900" b="1" dirty="0">
-                <a:solidFill>
-                  <a:srgbClr val="262626"/>
-                </a:solidFill>
-                <a:latin typeface="Calibri"/>
-                <a:ea typeface="Microsoft YaHei"/>
-              </a:rPr>
-              <a:t>主体丢失 &lt;5%</a:t>
-            </a:r>
-            <a:r>
-              <a:rPr lang="zh-CN" sz="1900" b="0" dirty="0">
-                <a:solidFill>
-                  <a:srgbClr val="262626"/>
-                </a:solidFill>
-                <a:latin typeface="Calibri"/>
-                <a:ea typeface="Microsoft YaHei"/>
-              </a:rPr>
-              <a:t>）</a:t>
-            </a:r>
-          </a:p>
-          <a:p>
-            <a:pPr algn="l">
-              <a:spcBef>
-                <a:spcPts val="0"/>
-              </a:spcBef>
-              <a:spcAft>
-                <a:spcPts val="700"/>
-              </a:spcAft>
-              <a:buFont typeface="Arial"/>
-              <a:buChar char="•"/>
-            </a:pPr>
-            <a:r>
-              <a:rPr lang="zh-CN" sz="1900" b="0" dirty="0">
-                <a:solidFill>
-                  <a:srgbClr val="262626"/>
-                </a:solidFill>
-                <a:latin typeface="Calibri"/>
-                <a:ea typeface="Microsoft YaHei"/>
-              </a:rPr>
-              <a:t>M2 · 18–30h：语义锚定 + 空间定位（</a:t>
-            </a:r>
-            <a:r>
-              <a:rPr lang="zh-CN" sz="1900" b="1" dirty="0">
-                <a:solidFill>
-                  <a:srgbClr val="262626"/>
-                </a:solidFill>
-                <a:latin typeface="Calibri"/>
-                <a:ea typeface="Microsoft YaHei"/>
-              </a:rPr>
-              <a:t>「朋友在哪」命中 ≥3/5</a:t>
-            </a:r>
-            <a:r>
-              <a:rPr lang="zh-CN" sz="1900" b="0" dirty="0">
-                <a:solidFill>
-                  <a:srgbClr val="262626"/>
-                </a:solidFill>
-                <a:latin typeface="Calibri"/>
-                <a:ea typeface="Microsoft YaHei"/>
-              </a:rPr>
-              <a:t>）</a:t>
-            </a:r>
-          </a:p>
-          <a:p>
-            <a:pPr algn="l">
-              <a:spcBef>
-                <a:spcPts val="0"/>
-              </a:spcBef>
-              <a:spcAft>
-                <a:spcPts val="700"/>
-              </a:spcAft>
-              <a:buFont typeface="Arial"/>
-              <a:buChar char="•"/>
-            </a:pPr>
-            <a:r>
-              <a:rPr lang="zh-CN" sz="1900" b="0" dirty="0">
-                <a:solidFill>
-                  <a:srgbClr val="262626"/>
-                </a:solidFill>
-                <a:latin typeface="Calibri"/>
-                <a:ea typeface="Microsoft YaHei"/>
-              </a:rPr>
-              <a:t>M3 · 30–42h：空间重构 + Gallery + 手势（切换 &lt;5s）</a:t>
-            </a:r>
-          </a:p>
-          <a:p>
-            <a:pPr algn="l">
-              <a:spcBef>
-                <a:spcPts val="0"/>
-              </a:spcBef>
-              <a:spcAft>
-                <a:spcPts val="700"/>
-              </a:spcAft>
-              <a:buFont typeface="Arial"/>
-              <a:buChar char="•"/>
-            </a:pPr>
-            <a:r>
-              <a:rPr lang="zh-CN" sz="1900" b="0" dirty="0">
-                <a:solidFill>
-                  <a:srgbClr val="262626"/>
-                </a:solidFill>
-                <a:latin typeface="Calibri"/>
-                <a:ea typeface="Microsoft YaHei"/>
-              </a:rPr>
-              <a:t>M4 · 42–48h：VR + 演示叙事</a:t>
+              <a:rPr lang="zh-CN" sz="1900" b="1" dirty="0">
+                <a:solidFill>
+                  <a:srgbClr val="262626"/>
+                </a:solidFill>
+                <a:latin typeface="Calibri"/>
+                <a:ea typeface="Microsoft YaHei"/>
+              </a:rPr>
+              <a:t>P0 灵魂</a:t>
+            </a:r>
+            <a:r>
+              <a:rPr lang="zh-CN" sz="1900" b="0" dirty="0">
+                <a:solidFill>
+                  <a:srgbClr val="262626"/>
+                </a:solidFill>
+                <a:latin typeface="Calibri"/>
+                <a:ea typeface="Microsoft YaHei"/>
+              </a:rPr>
+              <a:t>：一句话 → 懂素材的取材 → 可编辑时间轴（不可降级）</a:t>
+            </a:r>
+          </a:p>
+          <a:p>
+            <a:pPr algn="l">
+              <a:spcBef>
+                <a:spcPts val="0"/>
+              </a:spcBef>
+              <a:spcAft>
+                <a:spcPts val="700"/>
+              </a:spcAft>
+              <a:buFont typeface="Arial"/>
+              <a:buChar char="•"/>
+            </a:pPr>
+            <a:r>
+              <a:rPr lang="zh-CN" sz="1900" b="1" dirty="0">
+                <a:solidFill>
+                  <a:srgbClr val="262626"/>
+                </a:solidFill>
+                <a:latin typeface="Calibri"/>
+                <a:ea typeface="Microsoft YaHei"/>
+              </a:rPr>
+              <a:t>P1 形态</a:t>
+            </a:r>
+            <a:r>
+              <a:rPr lang="zh-CN" sz="1900" b="0" dirty="0">
+                <a:solidFill>
+                  <a:srgbClr val="262626"/>
+                </a:solidFill>
+                <a:latin typeface="Calibri"/>
+                <a:ea typeface="Microsoft YaHei"/>
+              </a:rPr>
+              <a:t>：星系选材 · 场景确认 · 时间轴精剪（三点一线）</a:t>
+            </a:r>
+          </a:p>
+          <a:p>
+            <a:pPr algn="l">
+              <a:spcBef>
+                <a:spcPts val="0"/>
+              </a:spcBef>
+              <a:spcAft>
+                <a:spcPts val="700"/>
+              </a:spcAft>
+              <a:buFont typeface="Arial"/>
+              <a:buChar char="•"/>
+            </a:pPr>
+            <a:r>
+              <a:rPr lang="zh-CN" sz="1900" b="1" dirty="0">
+                <a:solidFill>
+                  <a:srgbClr val="262626"/>
+                </a:solidFill>
+                <a:latin typeface="Calibri"/>
+                <a:ea typeface="Microsoft YaHei"/>
+              </a:rPr>
+              <a:t>P2 表现</a:t>
+            </a:r>
+            <a:r>
+              <a:rPr lang="zh-CN" sz="1900" b="0" dirty="0">
+                <a:solidFill>
+                  <a:srgbClr val="262626"/>
+                </a:solidFill>
+                <a:latin typeface="Calibri"/>
+                <a:ea typeface="Microsoft YaHei"/>
+              </a:rPr>
+              <a:t>：手势、VR、空间重温（加分项，出问题就砍）</a:t>
+            </a:r>
+          </a:p>
+          <a:p>
+            <a:pPr algn="l">
+              <a:spcBef>
+                <a:spcPts val="0"/>
+              </a:spcBef>
+              <a:spcAft>
+                <a:spcPts val="700"/>
+              </a:spcAft>
+              <a:buFont typeface="Arial"/>
+              <a:buChar char="•"/>
+            </a:pPr>
+            <a:r>
+              <a:rPr lang="zh-CN" sz="1900" b="0" dirty="0">
+                <a:solidFill>
+                  <a:srgbClr val="262626"/>
+                </a:solidFill>
+                <a:latin typeface="Calibri"/>
+                <a:ea typeface="Microsoft YaHei"/>
+              </a:rPr>
+              <a:t>自检：只保留一个画面——「说一句话，对的片段出现在时间轴上」</a:t>
             </a:r>
           </a:p>
         </p:txBody>
